--- a/Loan_Business_Profitability_Risk_Analysis.pptx
+++ b/Loan_Business_Profitability_Risk_Analysis.pptx
@@ -3154,7 +3154,7 @@
         <p:spPr>
           <a:xfrm>
             <a:off x="777240" y="868680"/>
-            <a:ext cx="7315200" cy="365760"/>
+            <a:ext cx="7315200" cy="215444"/>
           </a:xfrm>
           <a:prstGeom prst="rect">
             <a:avLst/>
@@ -3169,7 +3169,7 @@
           <a:p>
             <a:pPr algn="l"/>
             <a:r>
-              <a:rPr sz="1400" b="1" i="0" spc="220">
+              <a:rPr sz="1400" b="1" i="0" spc="220" dirty="0">
                 <a:solidFill>
                   <a:srgbClr val="6FB8C2"/>
                 </a:solidFill>
@@ -3177,6 +3177,21 @@
               </a:rPr>
               <a:t>LOAN PORTFOLIO PROFITABILITY</a:t>
             </a:r>
+            <a:r>
+              <a:rPr lang="en-IN" sz="1400" b="1" i="0" spc="220" dirty="0">
+                <a:solidFill>
+                  <a:srgbClr val="6FB8C2"/>
+                </a:solidFill>
+                <a:latin typeface="Calibri"/>
+              </a:rPr>
+              <a:t> AND RISK ANALYSIS</a:t>
+            </a:r>
+            <a:endParaRPr sz="1400" b="1" i="0" spc="220" dirty="0">
+              <a:solidFill>
+                <a:srgbClr val="6FB8C2"/>
+              </a:solidFill>
+              <a:latin typeface="Calibri"/>
+            </a:endParaRPr>
           </a:p>
         </p:txBody>
       </p:sp>
@@ -4147,7 +4162,7 @@
         <p:spPr>
           <a:xfrm>
             <a:off x="5074920" y="1316736"/>
-            <a:ext cx="5074920" cy="475488"/>
+            <a:ext cx="5074920" cy="276999"/>
           </a:xfrm>
           <a:prstGeom prst="rect">
             <a:avLst/>
@@ -4162,48 +4177,13 @@
           <a:p>
             <a:pPr algn="l"/>
             <a:r>
-              <a:rPr sz="1050" b="0">
+              <a:rPr sz="1200" b="0" dirty="0">
                 <a:solidFill>
                   <a:srgbClr val="20262D"/>
                 </a:solidFill>
                 <a:latin typeface="Aptos"/>
               </a:rPr>
               <a:t>Review pricing, tenure, loan size, funding cost and expected loss together.</a:t>
-            </a:r>
-          </a:p>
-        </p:txBody>
-      </p:sp>
-      <p:sp>
-        <p:nvSpPr>
-          <p:cNvPr id="11" name="TextBox 10"/>
-          <p:cNvSpPr txBox="1"/>
-          <p:nvPr/>
-        </p:nvSpPr>
-        <p:spPr>
-          <a:xfrm>
-            <a:off x="10287000" y="1316736"/>
-            <a:ext cx="914400" cy="320040"/>
-          </a:xfrm>
-          <a:prstGeom prst="rect">
-            <a:avLst/>
-          </a:prstGeom>
-          <a:noFill/>
-        </p:spPr>
-        <p:txBody>
-          <a:bodyPr wrap="square">
-            <a:spAutoFit/>
-          </a:bodyPr>
-          <a:lstStyle/>
-          <a:p>
-            <a:pPr algn="r"/>
-            <a:r>
-              <a:rPr sz="850" b="1">
-                <a:solidFill>
-                  <a:srgbClr val="626F7D"/>
-                </a:solidFill>
-                <a:latin typeface="Aptos"/>
-              </a:rPr>
-              <a:t>Management</a:t>
             </a:r>
           </a:p>
         </p:txBody>
@@ -4331,7 +4311,7 @@
         <p:spPr>
           <a:xfrm>
             <a:off x="5074920" y="2139696"/>
-            <a:ext cx="5074920" cy="475488"/>
+            <a:ext cx="5632704" cy="276999"/>
           </a:xfrm>
           <a:prstGeom prst="rect">
             <a:avLst/>
@@ -4346,48 +4326,13 @@
           <a:p>
             <a:pPr algn="l"/>
             <a:r>
-              <a:rPr sz="1050" b="0">
+              <a:rPr sz="1200" b="0" dirty="0">
                 <a:solidFill>
                   <a:srgbClr val="20262D"/>
                 </a:solidFill>
                 <a:latin typeface="Aptos"/>
               </a:rPr>
               <a:t>Approve low-rate loans only when expected return remains economically viable.</a:t>
-            </a:r>
-          </a:p>
-        </p:txBody>
-      </p:sp>
-      <p:sp>
-        <p:nvSpPr>
-          <p:cNvPr id="16" name="TextBox 15"/>
-          <p:cNvSpPr txBox="1"/>
-          <p:nvPr/>
-        </p:nvSpPr>
-        <p:spPr>
-          <a:xfrm>
-            <a:off x="10287000" y="2139696"/>
-            <a:ext cx="914400" cy="320040"/>
-          </a:xfrm>
-          <a:prstGeom prst="rect">
-            <a:avLst/>
-          </a:prstGeom>
-          <a:noFill/>
-        </p:spPr>
-        <p:txBody>
-          <a:bodyPr wrap="square">
-            <a:spAutoFit/>
-          </a:bodyPr>
-          <a:lstStyle/>
-          <a:p>
-            <a:pPr algn="r"/>
-            <a:r>
-              <a:rPr sz="850" b="1">
-                <a:solidFill>
-                  <a:srgbClr val="626F7D"/>
-                </a:solidFill>
-                <a:latin typeface="Aptos"/>
-              </a:rPr>
-              <a:t>Management</a:t>
             </a:r>
           </a:p>
         </p:txBody>
@@ -4515,7 +4460,7 @@
         <p:spPr>
           <a:xfrm>
             <a:off x="5074920" y="2962656"/>
-            <a:ext cx="5074920" cy="475488"/>
+            <a:ext cx="5074920" cy="276999"/>
           </a:xfrm>
           <a:prstGeom prst="rect">
             <a:avLst/>
@@ -4530,48 +4475,13 @@
           <a:p>
             <a:pPr algn="l"/>
             <a:r>
-              <a:rPr sz="1050" b="0">
+              <a:rPr sz="1200" b="0" dirty="0">
                 <a:solidFill>
                   <a:srgbClr val="20262D"/>
                 </a:solidFill>
                 <a:latin typeface="Aptos"/>
               </a:rPr>
               <a:t>Shorten maximum tenure or add risk/tenure-based pricing.</a:t>
-            </a:r>
-          </a:p>
-        </p:txBody>
-      </p:sp>
-      <p:sp>
-        <p:nvSpPr>
-          <p:cNvPr id="21" name="TextBox 20"/>
-          <p:cNvSpPr txBox="1"/>
-          <p:nvPr/>
-        </p:nvSpPr>
-        <p:spPr>
-          <a:xfrm>
-            <a:off x="10287000" y="2962656"/>
-            <a:ext cx="914400" cy="320040"/>
-          </a:xfrm>
-          <a:prstGeom prst="rect">
-            <a:avLst/>
-          </a:prstGeom>
-          <a:noFill/>
-        </p:spPr>
-        <p:txBody>
-          <a:bodyPr wrap="square">
-            <a:spAutoFit/>
-          </a:bodyPr>
-          <a:lstStyle/>
-          <a:p>
-            <a:pPr algn="r"/>
-            <a:r>
-              <a:rPr sz="850" b="1">
-                <a:solidFill>
-                  <a:srgbClr val="626F7D"/>
-                </a:solidFill>
-                <a:latin typeface="Aptos"/>
-              </a:rPr>
-              <a:t>Management</a:t>
             </a:r>
           </a:p>
         </p:txBody>
@@ -4699,7 +4609,7 @@
         <p:spPr>
           <a:xfrm>
             <a:off x="5074920" y="3785616"/>
-            <a:ext cx="5074920" cy="475488"/>
+            <a:ext cx="6035040" cy="276999"/>
           </a:xfrm>
           <a:prstGeom prst="rect">
             <a:avLst/>
@@ -4714,48 +4624,13 @@
           <a:p>
             <a:pPr algn="l"/>
             <a:r>
-              <a:rPr sz="1050" b="0">
+              <a:rPr sz="1200" b="0" dirty="0">
                 <a:solidFill>
                   <a:srgbClr val="20262D"/>
                 </a:solidFill>
                 <a:latin typeface="Aptos"/>
               </a:rPr>
               <a:t>Strengthen approval and exposure limits where loss concentration is high.</a:t>
-            </a:r>
-          </a:p>
-        </p:txBody>
-      </p:sp>
-      <p:sp>
-        <p:nvSpPr>
-          <p:cNvPr id="26" name="TextBox 25"/>
-          <p:cNvSpPr txBox="1"/>
-          <p:nvPr/>
-        </p:nvSpPr>
-        <p:spPr>
-          <a:xfrm>
-            <a:off x="10287000" y="3785616"/>
-            <a:ext cx="914400" cy="320040"/>
-          </a:xfrm>
-          <a:prstGeom prst="rect">
-            <a:avLst/>
-          </a:prstGeom>
-          <a:noFill/>
-        </p:spPr>
-        <p:txBody>
-          <a:bodyPr wrap="square">
-            <a:spAutoFit/>
-          </a:bodyPr>
-          <a:lstStyle/>
-          <a:p>
-            <a:pPr algn="r"/>
-            <a:r>
-              <a:rPr sz="850" b="1">
-                <a:solidFill>
-                  <a:srgbClr val="626F7D"/>
-                </a:solidFill>
-                <a:latin typeface="Aptos"/>
-              </a:rPr>
-              <a:t>Management</a:t>
             </a:r>
           </a:p>
         </p:txBody>
@@ -4883,7 +4758,7 @@
         <p:spPr>
           <a:xfrm>
             <a:off x="5074920" y="4608576"/>
-            <a:ext cx="5074920" cy="475488"/>
+            <a:ext cx="5074920" cy="276999"/>
           </a:xfrm>
           <a:prstGeom prst="rect">
             <a:avLst/>
@@ -4898,48 +4773,13 @@
           <a:p>
             <a:pPr algn="l"/>
             <a:r>
-              <a:rPr sz="1050" b="0">
+              <a:rPr sz="1200" b="0" dirty="0">
                 <a:solidFill>
                   <a:srgbClr val="20262D"/>
                 </a:solidFill>
                 <a:latin typeface="Aptos"/>
               </a:rPr>
               <a:t>Laptop and Bike are positive contributors; pursue controlled growth.</a:t>
-            </a:r>
-          </a:p>
-        </p:txBody>
-      </p:sp>
-      <p:sp>
-        <p:nvSpPr>
-          <p:cNvPr id="31" name="TextBox 30"/>
-          <p:cNvSpPr txBox="1"/>
-          <p:nvPr/>
-        </p:nvSpPr>
-        <p:spPr>
-          <a:xfrm>
-            <a:off x="10287000" y="4608576"/>
-            <a:ext cx="914400" cy="320040"/>
-          </a:xfrm>
-          <a:prstGeom prst="rect">
-            <a:avLst/>
-          </a:prstGeom>
-          <a:noFill/>
-        </p:spPr>
-        <p:txBody>
-          <a:bodyPr wrap="square">
-            <a:spAutoFit/>
-          </a:bodyPr>
-          <a:lstStyle/>
-          <a:p>
-            <a:pPr algn="r"/>
-            <a:r>
-              <a:rPr sz="850" b="1">
-                <a:solidFill>
-                  <a:srgbClr val="626F7D"/>
-                </a:solidFill>
-                <a:latin typeface="Aptos"/>
-              </a:rPr>
-              <a:t>Management</a:t>
             </a:r>
           </a:p>
         </p:txBody>
@@ -5047,7 +4887,7 @@
           <a:p>
             <a:pPr algn="l"/>
             <a:r>
-              <a:rPr sz="1300" b="1">
+              <a:rPr sz="1300" b="1" dirty="0">
                 <a:solidFill>
                   <a:srgbClr val="13263F"/>
                 </a:solidFill>
@@ -5067,7 +4907,7 @@
         <p:spPr>
           <a:xfrm>
             <a:off x="5074920" y="5431536"/>
-            <a:ext cx="5074920" cy="475488"/>
+            <a:ext cx="5632704" cy="276999"/>
           </a:xfrm>
           <a:prstGeom prst="rect">
             <a:avLst/>
@@ -5082,48 +4922,13 @@
           <a:p>
             <a:pPr algn="l"/>
             <a:r>
-              <a:rPr sz="1050" b="0">
+              <a:rPr sz="1200" b="0" dirty="0">
                 <a:solidFill>
                   <a:srgbClr val="20262D"/>
                 </a:solidFill>
                 <a:latin typeface="Aptos"/>
               </a:rPr>
               <a:t>Start with East, but diagnose product/rate/tenure mix before changing geography.</a:t>
-            </a:r>
-          </a:p>
-        </p:txBody>
-      </p:sp>
-      <p:sp>
-        <p:nvSpPr>
-          <p:cNvPr id="36" name="TextBox 35"/>
-          <p:cNvSpPr txBox="1"/>
-          <p:nvPr/>
-        </p:nvSpPr>
-        <p:spPr>
-          <a:xfrm>
-            <a:off x="10287000" y="5431536"/>
-            <a:ext cx="914400" cy="320040"/>
-          </a:xfrm>
-          <a:prstGeom prst="rect">
-            <a:avLst/>
-          </a:prstGeom>
-          <a:noFill/>
-        </p:spPr>
-        <p:txBody>
-          <a:bodyPr wrap="square">
-            <a:spAutoFit/>
-          </a:bodyPr>
-          <a:lstStyle/>
-          <a:p>
-            <a:pPr algn="r"/>
-            <a:r>
-              <a:rPr sz="850" b="1">
-                <a:solidFill>
-                  <a:srgbClr val="626F7D"/>
-                </a:solidFill>
-                <a:latin typeface="Aptos"/>
-              </a:rPr>
-              <a:t>Management</a:t>
             </a:r>
           </a:p>
         </p:txBody>
@@ -5169,40 +4974,6 @@
           <a:p>
             <a:pPr algn="ctr"/>
             <a:endParaRPr/>
-          </a:p>
-        </p:txBody>
-      </p:sp>
-      <p:sp>
-        <p:nvSpPr>
-          <p:cNvPr id="38" name="TextBox 37"/>
-          <p:cNvSpPr txBox="1"/>
-          <p:nvPr/>
-        </p:nvSpPr>
-        <p:spPr>
-          <a:xfrm>
-            <a:off x="594360" y="6501384"/>
-            <a:ext cx="10789920" cy="182880"/>
-          </a:xfrm>
-          <a:prstGeom prst="rect">
-            <a:avLst/>
-          </a:prstGeom>
-          <a:noFill/>
-        </p:spPr>
-        <p:txBody>
-          <a:bodyPr wrap="none">
-            <a:spAutoFit/>
-          </a:bodyPr>
-          <a:lstStyle/>
-          <a:p>
-            <a:r>
-              <a:rPr sz="750">
-                <a:solidFill>
-                  <a:srgbClr val="626F7D"/>
-                </a:solidFill>
-                <a:latin typeface="Aptos"/>
-              </a:rPr>
-              <a:t>Source: Loan Business Profitability Analysis | Advanced Excel Project</a:t>
-            </a:r>
           </a:p>
         </p:txBody>
       </p:sp>
@@ -6243,76 +6014,6 @@
           </a:fontRef>
         </p:style>
       </p:cxnSp>
-      <p:sp>
-        <p:nvSpPr>
-          <p:cNvPr id="26" name="TextBox 25"/>
-          <p:cNvSpPr txBox="1"/>
-          <p:nvPr/>
-        </p:nvSpPr>
-        <p:spPr>
-          <a:xfrm>
-            <a:off x="777240" y="6199632"/>
-            <a:ext cx="5486400" cy="292608"/>
-          </a:xfrm>
-          <a:prstGeom prst="rect">
-            <a:avLst/>
-          </a:prstGeom>
-          <a:noFill/>
-        </p:spPr>
-        <p:txBody>
-          <a:bodyPr wrap="square" lIns="0" tIns="0" rIns="0" bIns="0" anchor="t">
-            <a:spAutoFit/>
-          </a:bodyPr>
-          <a:lstStyle/>
-          <a:p>
-            <a:pPr algn="l"/>
-            <a:r>
-              <a:rPr sz="1050" b="1" i="0">
-                <a:solidFill>
-                  <a:srgbClr val="9DBECD"/>
-                </a:solidFill>
-                <a:latin typeface="Calibri"/>
-              </a:rPr>
-              <a:t>Loan Business Profitability Analysis</a:t>
-            </a:r>
-          </a:p>
-        </p:txBody>
-      </p:sp>
-      <p:sp>
-        <p:nvSpPr>
-          <p:cNvPr id="27" name="TextBox 26"/>
-          <p:cNvSpPr txBox="1"/>
-          <p:nvPr/>
-        </p:nvSpPr>
-        <p:spPr>
-          <a:xfrm>
-            <a:off x="6035040" y="6199632"/>
-            <a:ext cx="5376672" cy="292608"/>
-          </a:xfrm>
-          <a:prstGeom prst="rect">
-            <a:avLst/>
-          </a:prstGeom>
-          <a:noFill/>
-        </p:spPr>
-        <p:txBody>
-          <a:bodyPr wrap="square" lIns="0" tIns="0" rIns="0" bIns="0" anchor="t">
-            <a:spAutoFit/>
-          </a:bodyPr>
-          <a:lstStyle/>
-          <a:p>
-            <a:pPr algn="r"/>
-            <a:r>
-              <a:rPr sz="1050" b="0" i="0">
-                <a:solidFill>
-                  <a:srgbClr val="9DBECD"/>
-                </a:solidFill>
-                <a:latin typeface="Calibri"/>
-              </a:rPr>
-              <a:t>Tufan Bera   |   Advanced Excel Project</a:t>
-            </a:r>
-          </a:p>
-        </p:txBody>
-      </p:sp>
     </p:spTree>
   </p:cSld>
   <p:clrMapOvr>
@@ -7500,40 +7201,6 @@
           </a:p>
         </p:txBody>
       </p:sp>
-      <p:sp>
-        <p:nvSpPr>
-          <p:cNvPr id="32" name="TextBox 31"/>
-          <p:cNvSpPr txBox="1"/>
-          <p:nvPr/>
-        </p:nvSpPr>
-        <p:spPr>
-          <a:xfrm>
-            <a:off x="594360" y="6501384"/>
-            <a:ext cx="10789920" cy="182880"/>
-          </a:xfrm>
-          <a:prstGeom prst="rect">
-            <a:avLst/>
-          </a:prstGeom>
-          <a:noFill/>
-        </p:spPr>
-        <p:txBody>
-          <a:bodyPr wrap="none">
-            <a:spAutoFit/>
-          </a:bodyPr>
-          <a:lstStyle/>
-          <a:p>
-            <a:r>
-              <a:rPr sz="750" dirty="0">
-                <a:solidFill>
-                  <a:srgbClr val="626F7D"/>
-                </a:solidFill>
-                <a:latin typeface="Aptos"/>
-              </a:rPr>
-              <a:t>Source: Loan Business Profitability Analysis | Advanced Excel Project</a:t>
-            </a:r>
-          </a:p>
-        </p:txBody>
-      </p:sp>
     </p:spTree>
   </p:cSld>
   <p:clrMapOvr>
@@ -8767,40 +8434,6 @@
           </a:p>
         </p:txBody>
       </p:sp>
-      <p:sp>
-        <p:nvSpPr>
-          <p:cNvPr id="34" name="TextBox 33"/>
-          <p:cNvSpPr txBox="1"/>
-          <p:nvPr/>
-        </p:nvSpPr>
-        <p:spPr>
-          <a:xfrm>
-            <a:off x="594360" y="6501384"/>
-            <a:ext cx="10789920" cy="182880"/>
-          </a:xfrm>
-          <a:prstGeom prst="rect">
-            <a:avLst/>
-          </a:prstGeom>
-          <a:noFill/>
-        </p:spPr>
-        <p:txBody>
-          <a:bodyPr wrap="none">
-            <a:spAutoFit/>
-          </a:bodyPr>
-          <a:lstStyle/>
-          <a:p>
-            <a:r>
-              <a:rPr sz="750">
-                <a:solidFill>
-                  <a:srgbClr val="626F7D"/>
-                </a:solidFill>
-                <a:latin typeface="Aptos"/>
-              </a:rPr>
-              <a:t>Source: Loan Business Profitability Analysis | Advanced Excel Project</a:t>
-            </a:r>
-          </a:p>
-        </p:txBody>
-      </p:sp>
     </p:spTree>
   </p:cSld>
   <p:clrMapOvr>
@@ -9032,8 +8665,8 @@
         </p:blipFill>
         <p:spPr>
           <a:xfrm>
-            <a:off x="594360" y="1234440"/>
-            <a:ext cx="6492240" cy="4480560"/>
+            <a:off x="355870" y="1234440"/>
+            <a:ext cx="6730730" cy="4645152"/>
           </a:xfrm>
           <a:prstGeom prst="rect">
             <a:avLst/>
@@ -9430,40 +9063,6 @@
           <a:p>
             <a:pPr algn="ctr"/>
             <a:endParaRPr/>
-          </a:p>
-        </p:txBody>
-      </p:sp>
-      <p:sp>
-        <p:nvSpPr>
-          <p:cNvPr id="18" name="TextBox 17"/>
-          <p:cNvSpPr txBox="1"/>
-          <p:nvPr/>
-        </p:nvSpPr>
-        <p:spPr>
-          <a:xfrm>
-            <a:off x="594360" y="6501384"/>
-            <a:ext cx="10789920" cy="182880"/>
-          </a:xfrm>
-          <a:prstGeom prst="rect">
-            <a:avLst/>
-          </a:prstGeom>
-          <a:noFill/>
-        </p:spPr>
-        <p:txBody>
-          <a:bodyPr wrap="none">
-            <a:spAutoFit/>
-          </a:bodyPr>
-          <a:lstStyle/>
-          <a:p>
-            <a:r>
-              <a:rPr sz="750">
-                <a:solidFill>
-                  <a:srgbClr val="626F7D"/>
-                </a:solidFill>
-                <a:latin typeface="Aptos"/>
-              </a:rPr>
-              <a:t>Source: Loan Business Profitability Analysis | Advanced Excel Project</a:t>
-            </a:r>
           </a:p>
         </p:txBody>
       </p:sp>
@@ -10100,40 +9699,6 @@
           </a:p>
         </p:txBody>
       </p:sp>
-      <p:sp>
-        <p:nvSpPr>
-          <p:cNvPr id="18" name="TextBox 17"/>
-          <p:cNvSpPr txBox="1"/>
-          <p:nvPr/>
-        </p:nvSpPr>
-        <p:spPr>
-          <a:xfrm>
-            <a:off x="594360" y="6501384"/>
-            <a:ext cx="10789920" cy="182880"/>
-          </a:xfrm>
-          <a:prstGeom prst="rect">
-            <a:avLst/>
-          </a:prstGeom>
-          <a:noFill/>
-        </p:spPr>
-        <p:txBody>
-          <a:bodyPr wrap="none">
-            <a:spAutoFit/>
-          </a:bodyPr>
-          <a:lstStyle/>
-          <a:p>
-            <a:r>
-              <a:rPr sz="750">
-                <a:solidFill>
-                  <a:srgbClr val="626F7D"/>
-                </a:solidFill>
-                <a:latin typeface="Aptos"/>
-              </a:rPr>
-              <a:t>Source: Loan Business Profitability Analysis | Advanced Excel Project</a:t>
-            </a:r>
-          </a:p>
-        </p:txBody>
-      </p:sp>
     </p:spTree>
   </p:cSld>
   <p:clrMapOvr>
@@ -10767,40 +10332,6 @@
           </a:p>
         </p:txBody>
       </p:sp>
-      <p:sp>
-        <p:nvSpPr>
-          <p:cNvPr id="18" name="TextBox 17"/>
-          <p:cNvSpPr txBox="1"/>
-          <p:nvPr/>
-        </p:nvSpPr>
-        <p:spPr>
-          <a:xfrm>
-            <a:off x="594360" y="6501384"/>
-            <a:ext cx="10789920" cy="182880"/>
-          </a:xfrm>
-          <a:prstGeom prst="rect">
-            <a:avLst/>
-          </a:prstGeom>
-          <a:noFill/>
-        </p:spPr>
-        <p:txBody>
-          <a:bodyPr wrap="none">
-            <a:spAutoFit/>
-          </a:bodyPr>
-          <a:lstStyle/>
-          <a:p>
-            <a:r>
-              <a:rPr sz="750">
-                <a:solidFill>
-                  <a:srgbClr val="626F7D"/>
-                </a:solidFill>
-                <a:latin typeface="Aptos"/>
-              </a:rPr>
-              <a:t>Source: Loan Business Profitability Analysis | Advanced Excel Project</a:t>
-            </a:r>
-          </a:p>
-        </p:txBody>
-      </p:sp>
     </p:spTree>
   </p:cSld>
   <p:clrMapOvr>
@@ -11433,40 +10964,6 @@
           </a:p>
         </p:txBody>
       </p:sp>
-      <p:sp>
-        <p:nvSpPr>
-          <p:cNvPr id="18" name="TextBox 17"/>
-          <p:cNvSpPr txBox="1"/>
-          <p:nvPr/>
-        </p:nvSpPr>
-        <p:spPr>
-          <a:xfrm>
-            <a:off x="594360" y="6501384"/>
-            <a:ext cx="10789920" cy="182880"/>
-          </a:xfrm>
-          <a:prstGeom prst="rect">
-            <a:avLst/>
-          </a:prstGeom>
-          <a:noFill/>
-        </p:spPr>
-        <p:txBody>
-          <a:bodyPr wrap="none">
-            <a:spAutoFit/>
-          </a:bodyPr>
-          <a:lstStyle/>
-          <a:p>
-            <a:r>
-              <a:rPr sz="750">
-                <a:solidFill>
-                  <a:srgbClr val="626F7D"/>
-                </a:solidFill>
-                <a:latin typeface="Aptos"/>
-              </a:rPr>
-              <a:t>Source: Loan Business Profitability Analysis | Advanced Excel Project</a:t>
-            </a:r>
-          </a:p>
-        </p:txBody>
-      </p:sp>
     </p:spTree>
   </p:cSld>
   <p:clrMapOvr>
@@ -12098,40 +11595,6 @@
           </a:p>
         </p:txBody>
       </p:sp>
-      <p:sp>
-        <p:nvSpPr>
-          <p:cNvPr id="18" name="TextBox 17"/>
-          <p:cNvSpPr txBox="1"/>
-          <p:nvPr/>
-        </p:nvSpPr>
-        <p:spPr>
-          <a:xfrm>
-            <a:off x="594360" y="6501384"/>
-            <a:ext cx="10789920" cy="182880"/>
-          </a:xfrm>
-          <a:prstGeom prst="rect">
-            <a:avLst/>
-          </a:prstGeom>
-          <a:noFill/>
-        </p:spPr>
-        <p:txBody>
-          <a:bodyPr wrap="none">
-            <a:spAutoFit/>
-          </a:bodyPr>
-          <a:lstStyle/>
-          <a:p>
-            <a:r>
-              <a:rPr sz="750">
-                <a:solidFill>
-                  <a:srgbClr val="626F7D"/>
-                </a:solidFill>
-                <a:latin typeface="Aptos"/>
-              </a:rPr>
-              <a:t>Source: Loan Business Profitability Analysis | Regional chart represents Net Bank Profit/Loss by Region</a:t>
-            </a:r>
-          </a:p>
-        </p:txBody>
-      </p:sp>
     </p:spTree>
   </p:cSld>
   <p:clrMapOvr>
@@ -12760,40 +12223,6 @@
           <a:p>
             <a:pPr algn="ctr"/>
             <a:endParaRPr/>
-          </a:p>
-        </p:txBody>
-      </p:sp>
-      <p:sp>
-        <p:nvSpPr>
-          <p:cNvPr id="18" name="TextBox 17"/>
-          <p:cNvSpPr txBox="1"/>
-          <p:nvPr/>
-        </p:nvSpPr>
-        <p:spPr>
-          <a:xfrm>
-            <a:off x="594360" y="6501384"/>
-            <a:ext cx="10789920" cy="182880"/>
-          </a:xfrm>
-          <a:prstGeom prst="rect">
-            <a:avLst/>
-          </a:prstGeom>
-          <a:noFill/>
-        </p:spPr>
-        <p:txBody>
-          <a:bodyPr wrap="none">
-            <a:spAutoFit/>
-          </a:bodyPr>
-          <a:lstStyle/>
-          <a:p>
-            <a:r>
-              <a:rPr sz="750">
-                <a:solidFill>
-                  <a:srgbClr val="626F7D"/>
-                </a:solidFill>
-                <a:latin typeface="Aptos"/>
-              </a:rPr>
-              <a:t>Source: Loan Business Profitability Analysis | Advanced Excel Project</a:t>
-            </a:r>
           </a:p>
         </p:txBody>
       </p:sp>
